--- a/01_Planning/ChillTuna_LLM을 활용한 페르소나 시장조사+시뮬레이터_ver_1.1_제출용.pptx
+++ b/01_Planning/ChillTuna_LLM을 활용한 페르소나 시장조사+시뮬레이터_ver_1.1_제출용.pptx
@@ -233,7 +233,7 @@
           <a:p>
             <a:fld id="{ECBA5B7F-7B8A-42A5-9B6B-2D2B2E035833}" type="datetimeFigureOut">
               <a:rPr lang="ko-KR" altLang="en-US" smtClean="0"/>
-              <a:t>2025-08-04</a:t>
+              <a:t>2025-08-26</a:t>
             </a:fld>
             <a:endParaRPr lang="ko-KR" altLang="en-US"/>
           </a:p>
@@ -764,7 +764,7 @@
             <a:fld id="{1D8BD707-D9CF-40AE-B4C6-C98DA3205C09}" type="datetimeFigureOut">
               <a:rPr lang="en-US" smtClean="0"/>
               <a:pPr/>
-              <a:t>8/4/2025</a:t>
+              <a:t>8/26/2025</a:t>
             </a:fld>
             <a:endParaRPr lang="en-US"/>
           </a:p>
@@ -929,7 +929,7 @@
             <a:fld id="{1D8BD707-D9CF-40AE-B4C6-C98DA3205C09}" type="datetimeFigureOut">
               <a:rPr lang="en-US" smtClean="0"/>
               <a:pPr/>
-              <a:t>8/4/2025</a:t>
+              <a:t>8/26/2025</a:t>
             </a:fld>
             <a:endParaRPr lang="en-US"/>
           </a:p>
@@ -1104,7 +1104,7 @@
             <a:fld id="{1D8BD707-D9CF-40AE-B4C6-C98DA3205C09}" type="datetimeFigureOut">
               <a:rPr lang="en-US" smtClean="0"/>
               <a:pPr/>
-              <a:t>8/4/2025</a:t>
+              <a:t>8/26/2025</a:t>
             </a:fld>
             <a:endParaRPr lang="en-US"/>
           </a:p>
@@ -1269,7 +1269,7 @@
             <a:fld id="{1D8BD707-D9CF-40AE-B4C6-C98DA3205C09}" type="datetimeFigureOut">
               <a:rPr lang="en-US" smtClean="0"/>
               <a:pPr/>
-              <a:t>8/4/2025</a:t>
+              <a:t>8/26/2025</a:t>
             </a:fld>
             <a:endParaRPr lang="en-US"/>
           </a:p>
@@ -1511,7 +1511,7 @@
             <a:fld id="{1D8BD707-D9CF-40AE-B4C6-C98DA3205C09}" type="datetimeFigureOut">
               <a:rPr lang="en-US" smtClean="0"/>
               <a:pPr/>
-              <a:t>8/4/2025</a:t>
+              <a:t>8/26/2025</a:t>
             </a:fld>
             <a:endParaRPr lang="en-US"/>
           </a:p>
@@ -1793,7 +1793,7 @@
             <a:fld id="{1D8BD707-D9CF-40AE-B4C6-C98DA3205C09}" type="datetimeFigureOut">
               <a:rPr lang="en-US" smtClean="0"/>
               <a:pPr/>
-              <a:t>8/4/2025</a:t>
+              <a:t>8/26/2025</a:t>
             </a:fld>
             <a:endParaRPr lang="en-US"/>
           </a:p>
@@ -2209,7 +2209,7 @@
             <a:fld id="{1D8BD707-D9CF-40AE-B4C6-C98DA3205C09}" type="datetimeFigureOut">
               <a:rPr lang="en-US" smtClean="0"/>
               <a:pPr/>
-              <a:t>8/4/2025</a:t>
+              <a:t>8/26/2025</a:t>
             </a:fld>
             <a:endParaRPr lang="en-US"/>
           </a:p>
@@ -2323,7 +2323,7 @@
             <a:fld id="{1D8BD707-D9CF-40AE-B4C6-C98DA3205C09}" type="datetimeFigureOut">
               <a:rPr lang="en-US" smtClean="0"/>
               <a:pPr/>
-              <a:t>8/4/2025</a:t>
+              <a:t>8/26/2025</a:t>
             </a:fld>
             <a:endParaRPr lang="en-US"/>
           </a:p>
@@ -2415,7 +2415,7 @@
             <a:fld id="{1D8BD707-D9CF-40AE-B4C6-C98DA3205C09}" type="datetimeFigureOut">
               <a:rPr lang="en-US" smtClean="0"/>
               <a:pPr/>
-              <a:t>8/4/2025</a:t>
+              <a:t>8/26/2025</a:t>
             </a:fld>
             <a:endParaRPr lang="en-US"/>
           </a:p>
@@ -2687,7 +2687,7 @@
             <a:fld id="{1D8BD707-D9CF-40AE-B4C6-C98DA3205C09}" type="datetimeFigureOut">
               <a:rPr lang="en-US" smtClean="0"/>
               <a:pPr/>
-              <a:t>8/4/2025</a:t>
+              <a:t>8/26/2025</a:t>
             </a:fld>
             <a:endParaRPr lang="en-US"/>
           </a:p>
@@ -2936,7 +2936,7 @@
             <a:fld id="{1D8BD707-D9CF-40AE-B4C6-C98DA3205C09}" type="datetimeFigureOut">
               <a:rPr lang="en-US" smtClean="0"/>
               <a:pPr/>
-              <a:t>8/4/2025</a:t>
+              <a:t>8/26/2025</a:t>
             </a:fld>
             <a:endParaRPr lang="en-US"/>
           </a:p>
@@ -3144,7 +3144,7 @@
             <a:fld id="{1D8BD707-D9CF-40AE-B4C6-C98DA3205C09}" type="datetimeFigureOut">
               <a:rPr lang="en-US" smtClean="0"/>
               <a:pPr/>
-              <a:t>8/4/2025</a:t>
+              <a:t>8/26/2025</a:t>
             </a:fld>
             <a:endParaRPr lang="en-US"/>
           </a:p>
@@ -3582,8 +3582,8 @@
         </p:nvSpPr>
         <p:spPr>
           <a:xfrm>
-            <a:off x="4422167" y="1067479"/>
-            <a:ext cx="10915521" cy="0"/>
+            <a:off x="4554538" y="1067479"/>
+            <a:ext cx="10783150" cy="0"/>
           </a:xfrm>
           <a:prstGeom prst="line">
             <a:avLst/>
@@ -3678,15 +3678,15 @@
         </p:nvSpPr>
         <p:spPr>
           <a:xfrm>
-            <a:off x="1014811" y="861387"/>
-            <a:ext cx="3736349" cy="457113"/>
+            <a:off x="1014811" y="588854"/>
+            <a:ext cx="4349189" cy="956609"/>
           </a:xfrm>
           <a:prstGeom prst="rect">
             <a:avLst/>
           </a:prstGeom>
         </p:spPr>
         <p:txBody>
-          <a:bodyPr lIns="0" tIns="0" rIns="0" bIns="0" rtlCol="0" anchor="t">
+          <a:bodyPr wrap="square" lIns="0" tIns="0" rIns="0" bIns="0" rtlCol="0" anchor="t">
             <a:spAutoFit/>
           </a:bodyPr>
           <a:lstStyle/>
@@ -3705,7 +3705,7 @@
                 <a:cs typeface="Telegraf"/>
                 <a:sym typeface="Telegraf"/>
               </a:rPr>
-              <a:t>동원 </a:t>
+              <a:t>동원</a:t>
             </a:r>
             <a:r>
               <a:rPr lang="en-US" altLang="ko-KR" sz="2811" dirty="0">
@@ -3716,7 +3716,7 @@
                 <a:cs typeface="Telegraf"/>
                 <a:sym typeface="Telegraf"/>
               </a:rPr>
-              <a:t>AI </a:t>
+              <a:t>x</a:t>
             </a:r>
             <a:r>
               <a:rPr lang="ko-KR" altLang="en-US" sz="2811" dirty="0">
@@ -3727,7 +3727,50 @@
                 <a:cs typeface="Telegraf"/>
                 <a:sym typeface="Telegraf"/>
               </a:rPr>
-              <a:t>챌린지 출품</a:t>
+              <a:t>카이스트</a:t>
+            </a:r>
+            <a:br>
+              <a:rPr lang="en-US" altLang="ko-KR" sz="2811" dirty="0">
+                <a:solidFill>
+                  <a:srgbClr val="000000"/>
+                </a:solidFill>
+                <a:latin typeface="+mn-ea"/>
+                <a:cs typeface="Telegraf"/>
+                <a:sym typeface="Telegraf"/>
+              </a:rPr>
+            </a:br>
+            <a:r>
+              <a:rPr lang="ko-KR" altLang="en-US" sz="2811" dirty="0">
+                <a:solidFill>
+                  <a:srgbClr val="000000"/>
+                </a:solidFill>
+                <a:latin typeface="+mn-ea"/>
+                <a:cs typeface="Telegraf"/>
+                <a:sym typeface="Telegraf"/>
+              </a:rPr>
+              <a:t> </a:t>
+            </a:r>
+            <a:r>
+              <a:rPr lang="en-US" altLang="ko-KR" sz="2811" dirty="0">
+                <a:solidFill>
+                  <a:srgbClr val="000000"/>
+                </a:solidFill>
+                <a:latin typeface="+mn-ea"/>
+                <a:cs typeface="Telegraf"/>
+                <a:sym typeface="Telegraf"/>
+              </a:rPr>
+              <a:t>AI </a:t>
+            </a:r>
+            <a:r>
+              <a:rPr lang="ko-KR" altLang="en-US" sz="2811" dirty="0">
+                <a:solidFill>
+                  <a:srgbClr val="000000"/>
+                </a:solidFill>
+                <a:latin typeface="+mn-ea"/>
+                <a:cs typeface="Telegraf"/>
+                <a:sym typeface="Telegraf"/>
+              </a:rPr>
+              <a:t>챌린지 프로젝트</a:t>
             </a:r>
             <a:endParaRPr lang="en-US" sz="2811" dirty="0">
               <a:solidFill>
